--- a/docs/ecostats_lectures/lecture_16/16_01_lecture_powerpoint.pptx
+++ b/docs/ecostats_lectures/lecture_16/16_01_lecture_powerpoint.pptx
@@ -5711,7 +5711,7 @@
                 <a:pPr lvl="1"/>
                 <a:r>
                   <a:rPr/>
-                  <a:t>Loadings &gt; 0.3 or &lt; -0.3 are worth considerin</a:t>
+                  <a:t>Loadings &gt; 0.3 or &lt; -0.3 are worth considering</a:t>
                 </a:r>
               </a:p>
               <a:p>
@@ -9375,12 +9375,9 @@
         </p:nvSpPr>
         <p:spPr>
           <a:xfrm>
-            <a:off x="0" y="0"/>
-            <a:ext cx="9144000" cy="602780"/>
+            <a:off x="139485" y="78119"/>
+            <a:ext cx="8229600" cy="607682"/>
           </a:xfrm>
-          <a:solidFill>
-            <a:srgbClr val="70121D"/>
-          </a:solidFill>
         </p:spPr>
         <p:txBody>
           <a:bodyPr/>
@@ -9398,12 +9395,12 @@
       </p:sp>
       <p:sp>
         <p:nvSpPr>
-          <p:cNvPr id="3" name="Content Placeholder 2"/>
+          <p:cNvPr id="3" name="Text Placeholder 2"/>
           <p:cNvSpPr>
             <a:spLocks noGrp="1"/>
           </p:cNvSpPr>
           <p:nvPr>
-            <p:ph idx="1" sz="half"/>
+            <p:ph idx="1" type="body"/>
           </p:nvPr>
         </p:nvSpPr>
         <p:spPr/>
@@ -9552,12 +9549,12 @@
       </p:sp>
       <p:sp>
         <p:nvSpPr>
-          <p:cNvPr id="4" name="Content Placeholder 3"/>
+          <p:cNvPr id="5" name="Text Placeholder 4"/>
           <p:cNvSpPr>
             <a:spLocks noGrp="1"/>
           </p:cNvSpPr>
           <p:nvPr>
-            <p:ph idx="2" sz="half"/>
+            <p:ph idx="3" sz="quarter" type="body"/>
           </p:nvPr>
         </p:nvSpPr>
         <p:spPr/>
@@ -9572,14 +9569,88 @@
               <a:rPr>
                 <a:latin typeface="Courier"/>
               </a:rPr>
-              <a:t>![Darlingtonia pitcher structure showing measured features\]
-![](images/clipboard-4005369252.png){width="207"}
-- **Sites**:
--   TJH: T.J. Howell's Fen
--   DG: Day's Gulch
--   LEH: L.E. Hunter's Fen
--   HD: High Divide
- </a:t>
+              <a:t>![Darlingtonia pitcher structure showing measured features\]</a:t>
+            </a:r>
+          </a:p>
+        </p:txBody>
+      </p:sp>
+      <p:pic>
+        <p:nvPicPr>
+          <p:cNvPr descr="images/clipboard-4005369252.png" id="0" name="Picture 1"/>
+          <p:cNvPicPr>
+            <a:picLocks noGrp="1" noChangeAspect="1"/>
+          </p:cNvPicPr>
+          <p:nvPr/>
+        </p:nvPicPr>
+        <p:blipFill>
+          <a:blip r:embed="rId2"/>
+          <a:stretch>
+            <a:fillRect/>
+          </a:stretch>
+        </p:blipFill>
+        <p:spPr bwMode="auto">
+          <a:xfrm>
+            <a:off x="5486400" y="1295400"/>
+            <a:ext cx="2565400" cy="3276600"/>
+          </a:xfrm>
+          <a:prstGeom prst="rect">
+            <a:avLst/>
+          </a:prstGeom>
+          <a:noFill/>
+          <a:ln w="9525">
+            <a:noFill/>
+            <a:headEnd/>
+            <a:tailEnd/>
+          </a:ln>
+        </p:spPr>
+      </p:pic>
+      <p:sp>
+        <p:nvSpPr>
+          <p:cNvPr id="6" name="Content Placeholder 5"/>
+          <p:cNvSpPr>
+            <a:spLocks noGrp="1"/>
+          </p:cNvSpPr>
+          <p:nvPr>
+            <p:ph idx="4" sz="quarter"/>
+          </p:nvPr>
+        </p:nvSpPr>
+        <p:spPr/>
+        <p:txBody>
+          <a:bodyPr/>
+          <a:lstStyle/>
+          <a:p>
+            <a:pPr lvl="0"/>
+            <a:r>
+              <a:rPr/>
+              <a:t>**Sites**:</a:t>
+            </a:r>
+          </a:p>
+          <a:p>
+            <a:pPr lvl="0"/>
+            <a:r>
+              <a:rPr/>
+              <a:t>TJH: T.J. Howell’s Fen</a:t>
+            </a:r>
+          </a:p>
+          <a:p>
+            <a:pPr lvl="0"/>
+            <a:r>
+              <a:rPr/>
+              <a:t>DG: Day’s Gulch</a:t>
+            </a:r>
+          </a:p>
+          <a:p>
+            <a:pPr lvl="0"/>
+            <a:r>
+              <a:rPr/>
+              <a:t>LEH: L.E. Hunter’s Fen</a:t>
+            </a:r>
+          </a:p>
+          <a:p>
+            <a:pPr lvl="0"/>
+            <a:r>
+              <a:rPr/>
+              <a:t>HD: High Divide</a:t>
             </a:r>
           </a:p>
         </p:txBody>
